--- a/02-classes-constructors-destructors/slides-2-new-delete.pptx
+++ b/02-classes-constructors-destructors/slides-2-new-delete.pptx
@@ -127,6 +127,11 @@
       </a:defRPr>
     </a:lvl9pPr>
   </p:defaultTextStyle>
+  <p:extLst>
+    <p:ext uri="{EFAFB233-063F-42B5-8137-9DF3F51BA10A}">
+      <p15:sldGuideLst xmlns:p15="http://schemas.microsoft.com/office/powerpoint/2012/main"/>
+    </p:ext>
+  </p:extLst>
 </p:presentation>
 </file>
 
@@ -1715,7 +1720,7 @@
                 <a:uFillTx/>
                 <a:latin typeface="Arial"/>
               </a:rPr>
-              <a:t>2026-03-21</a:t>
+              <a:t>2026-03-23</a:t>
             </a:fld>
             <a:endParaRPr lang="en-US" sz="2400" b="0" u="none" strike="noStrike">
               <a:solidFill>
@@ -2648,7 +2653,7 @@
                 <a:uFillTx/>
                 <a:latin typeface="Arial"/>
               </a:rPr>
-              <a:t>2026-03-21</a:t>
+              <a:t>2026-03-23</a:t>
             </a:fld>
             <a:endParaRPr lang="en-US" sz="2400" b="0" u="none" strike="noStrike">
               <a:solidFill>
@@ -4125,7 +4130,7 @@
                 <a:uFillTx/>
                 <a:latin typeface="Arial"/>
               </a:rPr>
-              <a:t>2026-03-21</a:t>
+              <a:t>2026-03-23</a:t>
             </a:fld>
             <a:endParaRPr lang="en-US" sz="2400" b="0" u="none" strike="noStrike">
               <a:solidFill>
@@ -16087,7 +16092,7 @@
                 <a:uFillTx/>
                 <a:latin typeface="Consolas"/>
               </a:rPr>
-              <a:t>5</a:t>
+              <a:t>5}</a:t>
             </a:r>
             <a:r>
               <a:rPr lang="en-US" sz="2400" b="0" u="none" strike="noStrike">

--- a/02-classes-constructors-destructors/slides-2-new-delete.pptx
+++ b/02-classes-constructors-destructors/slides-2-new-delete.pptx
@@ -1720,7 +1720,7 @@
                 <a:uFillTx/>
                 <a:latin typeface="Arial"/>
               </a:rPr>
-              <a:t>2026-03-23</a:t>
+              <a:t>2026-03-27</a:t>
             </a:fld>
             <a:endParaRPr lang="en-US" sz="2400" b="0" u="none" strike="noStrike">
               <a:solidFill>
@@ -2653,7 +2653,7 @@
                 <a:uFillTx/>
                 <a:latin typeface="Arial"/>
               </a:rPr>
-              <a:t>2026-03-23</a:t>
+              <a:t>2026-03-27</a:t>
             </a:fld>
             <a:endParaRPr lang="en-US" sz="2400" b="0" u="none" strike="noStrike">
               <a:solidFill>
@@ -4130,7 +4130,7 @@
                 <a:uFillTx/>
                 <a:latin typeface="Arial"/>
               </a:rPr>
-              <a:t>2026-03-23</a:t>
+              <a:t>2026-03-27</a:t>
             </a:fld>
             <a:endParaRPr lang="en-US" sz="2400" b="0" u="none" strike="noStrike">
               <a:solidFill>
@@ -9939,9 +9939,6 @@
             </a:r>
             <a:r>
               <a:rPr lang="en-US" sz="2400" b="0" u="none" strike="noStrike">
-                <a:solidFill>
-                  <a:srgbClr val="FFFFFF"/>
-                </a:solidFill>
                 <a:effectLst/>
                 <a:uFillTx/>
                 <a:latin typeface="Consolas"/>

--- a/02-classes-constructors-destructors/slides-2-new-delete.pptx
+++ b/02-classes-constructors-destructors/slides-2-new-delete.pptx
@@ -1720,7 +1720,7 @@
                 <a:uFillTx/>
                 <a:latin typeface="Arial"/>
               </a:rPr>
-              <a:t>2026-03-27</a:t>
+              <a:t>2026-03-30</a:t>
             </a:fld>
             <a:endParaRPr lang="en-US" sz="2400" b="0" u="none" strike="noStrike">
               <a:solidFill>
@@ -2653,7 +2653,7 @@
                 <a:uFillTx/>
                 <a:latin typeface="Arial"/>
               </a:rPr>
-              <a:t>2026-03-27</a:t>
+              <a:t>2026-03-30</a:t>
             </a:fld>
             <a:endParaRPr lang="en-US" sz="2400" b="0" u="none" strike="noStrike">
               <a:solidFill>
@@ -4130,7 +4130,7 @@
                 <a:uFillTx/>
                 <a:latin typeface="Arial"/>
               </a:rPr>
-              <a:t>2026-03-27</a:t>
+              <a:t>2026-03-30</a:t>
             </a:fld>
             <a:endParaRPr lang="en-US" sz="2400" b="0" u="none" strike="noStrike">
               <a:solidFill>
@@ -5810,9 +5810,6 @@
           <a:lstStyle/>
           <a:p>
             <a:endParaRPr lang="en-US" sz="2600" b="0" u="none" strike="noStrike">
-              <a:solidFill>
-                <a:srgbClr val="FFFFFF"/>
-              </a:solidFill>
               <a:effectLst/>
               <a:uFillTx/>
               <a:latin typeface="Arial"/>
@@ -5829,9 +5826,6 @@
             </a:pPr>
             <a:r>
               <a:rPr lang="en-US" sz="2600" b="0" u="none" strike="noStrike">
-                <a:solidFill>
-                  <a:srgbClr val="FFFFFF"/>
-                </a:solidFill>
                 <a:effectLst/>
                 <a:uFillTx/>
                 <a:latin typeface="Arial"/>
@@ -5850,9 +5844,6 @@
             </a:pPr>
             <a:r>
               <a:rPr lang="en-US" sz="2600" b="0" u="none" strike="noStrike">
-                <a:solidFill>
-                  <a:srgbClr val="FFFFFF"/>
-                </a:solidFill>
                 <a:effectLst/>
                 <a:uFillTx/>
                 <a:latin typeface="Arial"/>
@@ -5871,9 +5862,6 @@
             </a:pPr>
             <a:r>
               <a:rPr lang="en-US" sz="2600" b="0" u="none" strike="noStrike">
-                <a:solidFill>
-                  <a:srgbClr val="FFFFFF"/>
-                </a:solidFill>
                 <a:effectLst/>
                 <a:uFillTx/>
                 <a:latin typeface="Arial"/>
@@ -7922,7 +7910,7 @@
         <p:spPr>
           <a:xfrm>
             <a:off x="457200" y="1371600"/>
-            <a:ext cx="7955280" cy="2369160"/>
+            <a:ext cx="7955280" cy="2553091"/>
           </a:xfrm>
           <a:prstGeom prst="rect">
             <a:avLst/>
@@ -7940,9 +7928,6 @@
           <a:p>
             <a:r>
               <a:rPr lang="en-US" sz="3200" b="0" u="none" strike="noStrike">
-                <a:solidFill>
-                  <a:srgbClr val="FFFFFF"/>
-                </a:solidFill>
                 <a:effectLst/>
                 <a:uFillTx/>
                 <a:latin typeface="Arial"/>
@@ -7953,9 +7938,6 @@
           <a:p>
             <a:r>
               <a:rPr lang="en-US" sz="3200" b="0" u="none" strike="noStrike">
-                <a:solidFill>
-                  <a:srgbClr val="FFFFFF"/>
-                </a:solidFill>
                 <a:effectLst/>
                 <a:uFillTx/>
                 <a:latin typeface="Arial"/>
@@ -7965,9 +7947,6 @@
           </a:p>
           <a:p>
             <a:endParaRPr lang="en-US" sz="3200" b="0" u="none" strike="noStrike">
-              <a:solidFill>
-                <a:srgbClr val="FFFFFF"/>
-              </a:solidFill>
               <a:effectLst/>
               <a:uFillTx/>
               <a:latin typeface="Arial"/>
@@ -7976,9 +7955,6 @@
           <a:p>
             <a:r>
               <a:rPr lang="en-US" sz="3200" b="0" u="none" strike="noStrike">
-                <a:solidFill>
-                  <a:srgbClr val="FFFFFF"/>
-                </a:solidFill>
                 <a:effectLst/>
                 <a:uFillTx/>
                 <a:latin typeface="Arial"/>
@@ -7989,9 +7965,6 @@
           <a:p>
             <a:r>
               <a:rPr lang="en-US" sz="3200" b="0" u="none" strike="noStrike">
-                <a:solidFill>
-                  <a:srgbClr val="FFFFFF"/>
-                </a:solidFill>
                 <a:effectLst/>
                 <a:uFillTx/>
                 <a:latin typeface="Arial"/>
